--- a/catalog/samples/table_of_contents.pptx
+++ b/catalog/samples/table_of_contents.pptx
@@ -1372,7 +1372,7 @@
           </a:p>
           <a:p>
             <a:r>
-              <a:t>  "template_sha256": "931ef2532a3b0496a238e228729dda48a493c967782270b508431ee54af8ea12"</a:t>
+              <a:t>  "template_sha256": "f21479061f6ffd57222393a713bb8a1700b323100ecabe9142e1c9c7cfb4dfb9"</a:t>
             </a:r>
           </a:p>
           <a:p>
